--- a/steam_analysis_presentation.pptx
+++ b/steam_analysis_presentation.pptx
@@ -147,7 +147,7 @@
     </p:spTree>
     <p:extLst>
       <p:ext uri="{BB962C8B-B14F-4D97-AF65-F5344CB8AC3E}">
-        <p14:creationId xmlns:p14="http://schemas.microsoft.com/office/powerpoint/2010/main" val="3716231072"/>
+        <p14:creationId xmlns:p14="http://schemas.microsoft.com/office/powerpoint/2010/main" val="188668432"/>
       </p:ext>
     </p:extLst>
   </p:cSld>
@@ -1775,7 +1775,7 @@
                 <a:ea typeface="Calibri" pitchFamily="34" charset="-122"/>
                 <a:cs typeface="Calibri" pitchFamily="34" charset="-120"/>
               </a:rPr>
-              <a:t>Valoración · Géneros · Precios · Evolución temporal</a:t>
+              <a:t>Valoración · Géneros · Gratuito vs Pago · Evolución temporal</a:t>
             </a:r>
             <a:endParaRPr lang="en-US" sz="1500" dirty="0"/>
           </a:p>
@@ -2984,7 +2984,9 @@
       </p:sp>
       <p:sp>
         <p:nvSpPr>
-          <p:cNvPr id="10" name="Text 8"/>
+          <p:cNvPr id="10" name="Text 8">
+            <a:hlinkClick r:id="rId3"/>
+          </p:cNvPr>
           <p:cNvSpPr/>
           <p:nvPr/>
         </p:nvSpPr>
@@ -3007,13 +3009,20 @@
               <a:buNone/>
             </a:pPr>
             <a:r>
-              <a:rPr lang="en-US" sz="1100" dirty="0">
-                <a:solidFill>
-                  <a:srgbClr val="C6D4DF"/>
+              <a:rPr lang="en-US" sz="1100" u="sng" dirty="0">
+                <a:solidFill>
+                  <a:srgbClr val="66C0F4"/>
                 </a:solidFill>
                 <a:latin typeface="Calibri" pitchFamily="34" charset="0"/>
                 <a:ea typeface="Calibri" pitchFamily="34" charset="-122"/>
                 <a:cs typeface="Calibri" pitchFamily="34" charset="-120"/>
+                <a:hlinkClick r:id="rId3">
+                  <a:extLst>
+                    <a:ext uri="{A12FA001-AC4F-418D-AE19-62706E023703}">
+                      <ahyp:hlinkClr xmlns:ahyp="http://schemas.microsoft.com/office/drawing/2018/hyperlinkcolor" val="tx"/>
+                    </a:ext>
+                  </a:extLst>
+                </a:hlinkClick>
               </a:rPr>
               <a:t>Dashboard Tableau</a:t>
             </a:r>
@@ -3098,7 +3107,9 @@
       </p:sp>
       <p:sp>
         <p:nvSpPr>
-          <p:cNvPr id="13" name="Text 11"/>
+          <p:cNvPr id="13" name="Text 11">
+            <a:hlinkClick r:id="rId4"/>
+          </p:cNvPr>
           <p:cNvSpPr/>
           <p:nvPr/>
         </p:nvSpPr>
@@ -3121,13 +3132,20 @@
               <a:buNone/>
             </a:pPr>
             <a:r>
-              <a:rPr lang="en-US" sz="1100" dirty="0">
-                <a:solidFill>
-                  <a:srgbClr val="C6D4DF"/>
+              <a:rPr lang="en-US" sz="1100" u="sng" dirty="0">
+                <a:solidFill>
+                  <a:srgbClr val="66C0F4"/>
                 </a:solidFill>
                 <a:latin typeface="Calibri" pitchFamily="34" charset="0"/>
                 <a:ea typeface="Calibri" pitchFamily="34" charset="-122"/>
                 <a:cs typeface="Calibri" pitchFamily="34" charset="-120"/>
+                <a:hlinkClick r:id="rId4">
+                  <a:extLst>
+                    <a:ext uri="{A12FA001-AC4F-418D-AE19-62706E023703}">
+                      <ahyp:hlinkClr xmlns:ahyp="http://schemas.microsoft.com/office/drawing/2018/hyperlinkcolor" val="tx"/>
+                    </a:ext>
+                  </a:extLst>
+                </a:hlinkClick>
               </a:rPr>
               <a:t>Repositorio GitHub</a:t>
             </a:r>
@@ -3212,7 +3230,9 @@
       </p:sp>
       <p:sp>
         <p:nvSpPr>
-          <p:cNvPr id="16" name="Text 14"/>
+          <p:cNvPr id="16" name="Text 14">
+            <a:hlinkClick r:id="rId5"/>
+          </p:cNvPr>
           <p:cNvSpPr/>
           <p:nvPr/>
         </p:nvSpPr>
@@ -3235,13 +3255,20 @@
               <a:buNone/>
             </a:pPr>
             <a:r>
-              <a:rPr lang="en-US" sz="1100" dirty="0">
-                <a:solidFill>
-                  <a:srgbClr val="C6D4DF"/>
+              <a:rPr lang="en-US" sz="1100" u="sng" dirty="0">
+                <a:solidFill>
+                  <a:srgbClr val="66C0F4"/>
                 </a:solidFill>
                 <a:latin typeface="Calibri" pitchFamily="34" charset="0"/>
                 <a:ea typeface="Calibri" pitchFamily="34" charset="-122"/>
                 <a:cs typeface="Calibri" pitchFamily="34" charset="-120"/>
+                <a:hlinkClick r:id="rId5">
+                  <a:extLst>
+                    <a:ext uri="{A12FA001-AC4F-418D-AE19-62706E023703}">
+                      <ahyp:hlinkClr xmlns:ahyp="http://schemas.microsoft.com/office/drawing/2018/hyperlinkcolor" val="tx"/>
+                    </a:ext>
+                  </a:extLst>
+                </a:hlinkClick>
               </a:rPr>
               <a:t>LinkedIn</a:t>
             </a:r>
@@ -4955,7 +4982,7 @@
         <p:spPr>
           <a:xfrm>
             <a:off x="640080" y="3337560"/>
-            <a:ext cx="7772400" cy="1554480"/>
+            <a:ext cx="7772400" cy="1371600"/>
           </a:xfrm>
           <a:prstGeom prst="rect">
             <a:avLst/>
@@ -5037,6 +5064,77 @@
               <a:t>¿Cómo evolucionó la calidad promedio con los años?</a:t>
             </a:r>
             <a:endParaRPr lang="en-US" sz="1300" dirty="0"/>
+          </a:p>
+        </p:txBody>
+      </p:sp>
+      <p:sp>
+        <p:nvSpPr>
+          <p:cNvPr id="18" name="Shape 16"/>
+          <p:cNvSpPr/>
+          <p:nvPr/>
+        </p:nvSpPr>
+        <p:spPr>
+          <a:xfrm>
+            <a:off x="0" y="4846320"/>
+            <a:ext cx="9144000" cy="292608"/>
+          </a:xfrm>
+          <a:prstGeom prst="rect">
+            <a:avLst/>
+          </a:prstGeom>
+          <a:solidFill>
+            <a:srgbClr val="2A475E"/>
+          </a:solidFill>
+          <a:ln w="12700">
+            <a:solidFill>
+              <a:srgbClr val="2A475E"/>
+            </a:solidFill>
+            <a:prstDash val="solid"/>
+          </a:ln>
+        </p:spPr>
+        <p:txBody>
+          <a:bodyPr/>
+          <a:lstStyle/>
+          <a:p>
+            <a:endParaRPr lang="es-AR"/>
+          </a:p>
+        </p:txBody>
+      </p:sp>
+      <p:sp>
+        <p:nvSpPr>
+          <p:cNvPr id="19" name="Text 17"/>
+          <p:cNvSpPr/>
+          <p:nvPr/>
+        </p:nvSpPr>
+        <p:spPr>
+          <a:xfrm>
+            <a:off x="274320" y="4864608"/>
+            <a:ext cx="8595360" cy="256032"/>
+          </a:xfrm>
+          <a:prstGeom prst="rect">
+            <a:avLst/>
+          </a:prstGeom>
+          <a:noFill/>
+          <a:ln/>
+        </p:spPr>
+        <p:txBody>
+          <a:bodyPr wrap="square" lIns="0" tIns="0" rIns="0" bIns="0" rtlCol="0" anchor="ctr"/>
+          <a:lstStyle/>
+          <a:p>
+            <a:pPr marL="0" indent="0">
+              <a:buNone/>
+            </a:pPr>
+            <a:r>
+              <a:rPr lang="en-US" sz="900" dirty="0">
+                <a:solidFill>
+                  <a:srgbClr val="8F98A0"/>
+                </a:solidFill>
+                <a:latin typeface="Calibri" pitchFamily="34" charset="0"/>
+                <a:ea typeface="Calibri" pitchFamily="34" charset="-122"/>
+                <a:cs typeface="Calibri" pitchFamily="34" charset="-120"/>
+              </a:rPr>
+              <a:t>📁  Fuente: Kaggle — Steam Store Games (Clean dataset)  ·  Nik Davis  ·  kaggle.com/datasets/nikdavis/steam-store-games</a:t>
+            </a:r>
+            <a:endParaRPr lang="en-US" sz="900" dirty="0"/>
           </a:p>
         </p:txBody>
       </p:sp>
